--- a/Module5_Demo_v1.0/Module5_Advanced_Prompt_Engineering.pptx
+++ b/Module5_Demo_v1.0/Module5_Advanced_Prompt_Engineering.pptx
@@ -14449,72 +14449,216 @@
           <a:bodyPr wrap="square" lIns="0" tIns="0" rIns="0" bIns="0" rtlCol="0" anchor="t"/>
           <a:lstStyle/>
           <a:p>
-            <a:pPr marL="0" indent="0">
-              <a:lnSpc>
-                <a:spcPct val="130000"/>
-              </a:lnSpc>
-              <a:buNone/>
-            </a:pPr>
-            <a:r>
-              <a:rPr lang="en-US" sz="1150" i="1" dirty="0">
-                <a:solidFill>
-                  <a:srgbClr val="E8EDF5"/>
-                </a:solidFill>
-                <a:latin typeface="Calibri" pitchFamily="34" charset="0"/>
-                <a:ea typeface="Calibri" pitchFamily="34" charset="-122"/>
-                <a:cs typeface="Calibri" pitchFamily="34" charset="-120"/>
-              </a:rPr>
-              <a:t>Ask the same math question 5 times:</a:t>
-            </a:r>
-            <a:endParaRPr lang="en-US" sz="1150" dirty="0"/>
-          </a:p>
-          <a:p>
-            <a:pPr marL="0" indent="0">
-              <a:lnSpc>
-                <a:spcPct val="130000"/>
-              </a:lnSpc>
-              <a:buNone/>
-            </a:pPr>
-            <a:r>
-              <a:rPr lang="en-US" sz="1150" i="1" dirty="0">
-                <a:solidFill>
-                  <a:srgbClr val="E8EDF5"/>
-                </a:solidFill>
-                <a:latin typeface="Calibri" pitchFamily="34" charset="0"/>
-                <a:ea typeface="Calibri" pitchFamily="34" charset="-122"/>
-                <a:cs typeface="Calibri" pitchFamily="34" charset="-120"/>
-              </a:rPr>
-              <a:t>Answers returned: 16, 16, 14, 16, 16</a:t>
-            </a:r>
-            <a:endParaRPr lang="en-US" sz="1150" dirty="0"/>
-          </a:p>
-          <a:p>
-            <a:pPr marL="0" indent="0">
-              <a:lnSpc>
-                <a:spcPct val="130000"/>
-              </a:lnSpc>
-              <a:buNone/>
-            </a:pPr>
-            <a:endParaRPr lang="en-US" sz="1150" dirty="0"/>
-          </a:p>
-          <a:p>
-            <a:pPr marL="0" indent="0">
-              <a:lnSpc>
-                <a:spcPct val="130000"/>
-              </a:lnSpc>
-              <a:buNone/>
-            </a:pPr>
-            <a:r>
-              <a:rPr lang="en-US" sz="1150" i="1" dirty="0">
-                <a:solidFill>
-                  <a:srgbClr val="E8EDF5"/>
-                </a:solidFill>
-                <a:latin typeface="Calibri" pitchFamily="34" charset="0"/>
-                <a:ea typeface="Calibri" pitchFamily="34" charset="-122"/>
-                <a:cs typeface="Calibri" pitchFamily="34" charset="-120"/>
-              </a:rPr>
-              <a:t>One chain made an arithmetic slip and landed on 14 — the majority vote (16) still wins, correcting for that one bad path.</a:t>
-            </a:r>
+            <a:r>
+              <a:rPr lang="en-GB" sz="1200" dirty="0">
+                <a:solidFill>
+                  <a:schemeClr val="bg1"/>
+                </a:solidFill>
+              </a:rPr>
+              <a:t>“Which is the shortest route from A to D?”</a:t>
+            </a:r>
+          </a:p>
+          <a:p>
+            <a:endParaRPr lang="en-GB" sz="1200" dirty="0">
+              <a:solidFill>
+                <a:schemeClr val="bg1"/>
+              </a:solidFill>
+            </a:endParaRPr>
+          </a:p>
+          <a:p>
+            <a:r>
+              <a:rPr lang="en-GB" sz="1200" dirty="0">
+                <a:solidFill>
+                  <a:schemeClr val="bg1"/>
+                </a:solidFill>
+              </a:rPr>
+              <a:t>Ask the model </a:t>
+            </a:r>
+            <a:r>
+              <a:rPr lang="en-GB" sz="1200" b="1" dirty="0">
+                <a:solidFill>
+                  <a:schemeClr val="bg1"/>
+                </a:solidFill>
+              </a:rPr>
+              <a:t>5 times independently</a:t>
+            </a:r>
+            <a:r>
+              <a:rPr lang="en-GB" sz="1200" dirty="0">
+                <a:solidFill>
+                  <a:schemeClr val="bg1"/>
+                </a:solidFill>
+              </a:rPr>
+              <a:t>:</a:t>
+            </a:r>
+          </a:p>
+          <a:p>
+            <a:pPr lvl="0"/>
+            <a:r>
+              <a:rPr lang="en-GB" sz="1200" dirty="0">
+                <a:solidFill>
+                  <a:schemeClr val="bg1"/>
+                </a:solidFill>
+              </a:rPr>
+              <a:t>Path 1 → </a:t>
+            </a:r>
+            <a:r>
+              <a:rPr lang="en-GB" sz="1200" b="1" dirty="0">
+                <a:solidFill>
+                  <a:schemeClr val="bg1"/>
+                </a:solidFill>
+              </a:rPr>
+              <a:t>12 km</a:t>
+            </a:r>
+            <a:r>
+              <a:rPr lang="en-GB" sz="1200" dirty="0">
+                <a:solidFill>
+                  <a:schemeClr val="bg1"/>
+                </a:solidFill>
+              </a:rPr>
+              <a:t> </a:t>
+            </a:r>
+          </a:p>
+          <a:p>
+            <a:pPr lvl="0"/>
+            <a:r>
+              <a:rPr lang="en-GB" sz="1200" dirty="0">
+                <a:solidFill>
+                  <a:schemeClr val="bg1"/>
+                </a:solidFill>
+              </a:rPr>
+              <a:t>Path 2 → </a:t>
+            </a:r>
+            <a:r>
+              <a:rPr lang="en-GB" sz="1200" b="1" dirty="0">
+                <a:solidFill>
+                  <a:schemeClr val="bg1"/>
+                </a:solidFill>
+              </a:rPr>
+              <a:t>15 km</a:t>
+            </a:r>
+            <a:r>
+              <a:rPr lang="en-GB" sz="1200" dirty="0">
+                <a:solidFill>
+                  <a:schemeClr val="bg1"/>
+                </a:solidFill>
+              </a:rPr>
+              <a:t> </a:t>
+            </a:r>
+          </a:p>
+          <a:p>
+            <a:pPr lvl="0"/>
+            <a:r>
+              <a:rPr lang="en-GB" sz="1200" dirty="0">
+                <a:solidFill>
+                  <a:schemeClr val="bg1"/>
+                </a:solidFill>
+              </a:rPr>
+              <a:t>Path 3 → </a:t>
+            </a:r>
+            <a:r>
+              <a:rPr lang="en-GB" sz="1200" b="1" dirty="0">
+                <a:solidFill>
+                  <a:schemeClr val="bg1"/>
+                </a:solidFill>
+              </a:rPr>
+              <a:t>12 km</a:t>
+            </a:r>
+            <a:r>
+              <a:rPr lang="en-GB" sz="1200" dirty="0">
+                <a:solidFill>
+                  <a:schemeClr val="bg1"/>
+                </a:solidFill>
+              </a:rPr>
+              <a:t> </a:t>
+            </a:r>
+          </a:p>
+          <a:p>
+            <a:pPr lvl="0"/>
+            <a:r>
+              <a:rPr lang="en-GB" sz="1200" dirty="0">
+                <a:solidFill>
+                  <a:schemeClr val="bg1"/>
+                </a:solidFill>
+              </a:rPr>
+              <a:t>Path 4 → </a:t>
+            </a:r>
+            <a:r>
+              <a:rPr lang="en-GB" sz="1200" b="1" dirty="0">
+                <a:solidFill>
+                  <a:schemeClr val="bg1"/>
+                </a:solidFill>
+              </a:rPr>
+              <a:t>18 km</a:t>
+            </a:r>
+            <a:r>
+              <a:rPr lang="en-GB" sz="1200" dirty="0">
+                <a:solidFill>
+                  <a:schemeClr val="bg1"/>
+                </a:solidFill>
+              </a:rPr>
+              <a:t> </a:t>
+            </a:r>
+          </a:p>
+          <a:p>
+            <a:pPr lvl="0"/>
+            <a:r>
+              <a:rPr lang="en-GB" sz="1200" dirty="0">
+                <a:solidFill>
+                  <a:schemeClr val="bg1"/>
+                </a:solidFill>
+              </a:rPr>
+              <a:t>Path 5 → </a:t>
+            </a:r>
+            <a:r>
+              <a:rPr lang="en-GB" sz="1200" b="1" dirty="0">
+                <a:solidFill>
+                  <a:schemeClr val="bg1"/>
+                </a:solidFill>
+              </a:rPr>
+              <a:t>12 km</a:t>
+            </a:r>
+            <a:r>
+              <a:rPr lang="en-GB" sz="1200" dirty="0">
+                <a:solidFill>
+                  <a:schemeClr val="bg1"/>
+                </a:solidFill>
+              </a:rPr>
+              <a:t> </a:t>
+            </a:r>
+          </a:p>
+          <a:p>
+            <a:endParaRPr lang="en-GB" sz="1200" dirty="0">
+              <a:solidFill>
+                <a:schemeClr val="bg1"/>
+              </a:solidFill>
+            </a:endParaRPr>
+          </a:p>
+          <a:p>
+            <a:r>
+              <a:rPr lang="en-GB" sz="1200" dirty="0">
+                <a:solidFill>
+                  <a:schemeClr val="bg1"/>
+                </a:solidFill>
+              </a:rPr>
+              <a:t>Then:</a:t>
+            </a:r>
+          </a:p>
+          <a:p>
+            <a:r>
+              <a:rPr lang="en-GB" sz="1200" b="1" dirty="0">
+                <a:solidFill>
+                  <a:schemeClr val="bg1"/>
+                </a:solidFill>
+              </a:rPr>
+              <a:t>Majority answer → 12 km</a:t>
+            </a:r>
+            <a:endParaRPr lang="en-GB" sz="1200" dirty="0">
+              <a:solidFill>
+                <a:schemeClr val="bg1"/>
+              </a:solidFill>
+            </a:endParaRPr>
+          </a:p>
+          <a:p>
             <a:endParaRPr lang="en-US" sz="1150" dirty="0"/>
           </a:p>
         </p:txBody>
@@ -14783,7 +14927,23 @@
                 <a:ea typeface="Calibri" pitchFamily="34" charset="-122"/>
                 <a:cs typeface="Calibri" pitchFamily="34" charset="-120"/>
               </a:rPr>
-              <a:t>Asking the model to recall what it knows before asking it to use that knowledge.</a:t>
+              <a:t>Normal Prompting: Question -&gt; Answer</a:t>
+            </a:r>
+          </a:p>
+          <a:p>
+            <a:pPr marL="0" indent="0">
+              <a:buNone/>
+            </a:pPr>
+            <a:r>
+              <a:rPr lang="en-US" sz="1350" dirty="0">
+                <a:solidFill>
+                  <a:srgbClr val="5B6B85"/>
+                </a:solidFill>
+                <a:latin typeface="Calibri" pitchFamily="34" charset="0"/>
+                <a:ea typeface="Calibri" pitchFamily="34" charset="-122"/>
+                <a:cs typeface="Calibri" pitchFamily="34" charset="-120"/>
+              </a:rPr>
+              <a:t>General knowledge Prompting: Question -&gt; Generate relevant knowledge -&gt; Use that knowledge -&gt; Answer</a:t>
             </a:r>
             <a:endParaRPr lang="en-US" sz="1350" dirty="0"/>
           </a:p>
@@ -15435,73 +15595,107 @@
           <a:bodyPr wrap="square" lIns="0" tIns="0" rIns="0" bIns="0" rtlCol="0" anchor="t"/>
           <a:lstStyle/>
           <a:p>
-            <a:pPr marL="0" indent="0">
-              <a:lnSpc>
-                <a:spcPct val="130000"/>
-              </a:lnSpc>
-              <a:buNone/>
-            </a:pPr>
             <a:r>
               <a:rPr lang="en-US" sz="1150" i="1" dirty="0">
                 <a:solidFill>
-                  <a:srgbClr val="E8EDF5"/>
-                </a:solidFill>
-                <a:latin typeface="Calibri" pitchFamily="34" charset="0"/>
-                <a:ea typeface="Calibri" pitchFamily="34" charset="-122"/>
-                <a:cs typeface="Calibri" pitchFamily="34" charset="-120"/>
-              </a:rPr>
-              <a:t>Step 1: “List facts relevant to why metal feels colder than wood at the same temperature.”</a:t>
-            </a:r>
-            <a:endParaRPr lang="en-US" sz="1150" dirty="0"/>
-          </a:p>
-          <a:p>
-            <a:pPr marL="0" indent="0">
-              <a:lnSpc>
-                <a:spcPct val="130000"/>
-              </a:lnSpc>
-              <a:buNone/>
-            </a:pPr>
-            <a:r>
-              <a:rPr lang="en-US" sz="1150" i="1" dirty="0">
-                <a:solidFill>
-                  <a:srgbClr val="E8EDF5"/>
-                </a:solidFill>
-                <a:latin typeface="Calibri" pitchFamily="34" charset="0"/>
-                <a:ea typeface="Calibri" pitchFamily="34" charset="-122"/>
-                <a:cs typeface="Calibri" pitchFamily="34" charset="-120"/>
-              </a:rPr>
-              <a:t>→ Model recalls thermal conductivity differences.</a:t>
-            </a:r>
-            <a:endParaRPr lang="en-US" sz="1150" dirty="0"/>
-          </a:p>
-          <a:p>
-            <a:pPr marL="0" indent="0">
-              <a:lnSpc>
-                <a:spcPct val="130000"/>
-              </a:lnSpc>
-              <a:buNone/>
-            </a:pPr>
-            <a:endParaRPr lang="en-US" sz="1150" dirty="0"/>
-          </a:p>
-          <a:p>
-            <a:pPr marL="0" indent="0">
-              <a:lnSpc>
-                <a:spcPct val="130000"/>
-              </a:lnSpc>
-              <a:buNone/>
-            </a:pPr>
-            <a:r>
-              <a:rPr lang="en-US" sz="1150" i="1" dirty="0">
-                <a:solidFill>
-                  <a:srgbClr val="E8EDF5"/>
-                </a:solidFill>
-                <a:latin typeface="Calibri" pitchFamily="34" charset="0"/>
-                <a:ea typeface="Calibri" pitchFamily="34" charset="-122"/>
-                <a:cs typeface="Calibri" pitchFamily="34" charset="-120"/>
-              </a:rPr>
-              <a:t>Step 2: “Using those facts, explain the sensation to a beginner.”</a:t>
-            </a:r>
-            <a:endParaRPr lang="en-US" sz="1150" dirty="0"/>
+                  <a:schemeClr val="bg1"/>
+                </a:solidFill>
+                <a:latin typeface="Calibri" pitchFamily="34" charset="0"/>
+                <a:ea typeface="Calibri" pitchFamily="34" charset="-122"/>
+                <a:cs typeface="Calibri" pitchFamily="34" charset="-120"/>
+              </a:rPr>
+              <a:t>Question: </a:t>
+            </a:r>
+            <a:r>
+              <a:rPr lang="en-GB" sz="1200" dirty="0">
+                <a:solidFill>
+                  <a:schemeClr val="bg1"/>
+                </a:solidFill>
+              </a:rPr>
+              <a:t>Why do airplanes fly despite being so heavy?</a:t>
+            </a:r>
+          </a:p>
+          <a:p>
+            <a:endParaRPr lang="en-GB" sz="1200" dirty="0">
+              <a:solidFill>
+                <a:schemeClr val="bg1"/>
+              </a:solidFill>
+            </a:endParaRPr>
+          </a:p>
+          <a:p>
+            <a:r>
+              <a:rPr lang="en-GB" sz="1200" dirty="0">
+                <a:solidFill>
+                  <a:schemeClr val="bg1"/>
+                </a:solidFill>
+              </a:rPr>
+              <a:t>Step 1: General knowledge - List the key facts needed to explain why airplanes can fly.”</a:t>
+            </a:r>
+          </a:p>
+          <a:p>
+            <a:pPr marL="171450" indent="-171450">
+              <a:buFont typeface="Wingdings" panose="05000000000000000000" pitchFamily="2" charset="2"/>
+              <a:buChar char="è"/>
+            </a:pPr>
+            <a:r>
+              <a:rPr lang="en-GB" sz="1200" dirty="0">
+                <a:solidFill>
+                  <a:schemeClr val="bg1"/>
+                </a:solidFill>
+              </a:rPr>
+              <a:t>Model generates: </a:t>
+            </a:r>
+            <a:r>
+              <a:rPr lang="en-GB" sz="1200" b="1" dirty="0">
+                <a:solidFill>
+                  <a:schemeClr val="bg1"/>
+                </a:solidFill>
+              </a:rPr>
+              <a:t>lift, wings, air pressure, airflow, thrust, gravity, drag</a:t>
+            </a:r>
+          </a:p>
+          <a:p>
+            <a:endParaRPr lang="en-US" sz="1150" dirty="0">
+              <a:solidFill>
+                <a:schemeClr val="bg1"/>
+              </a:solidFill>
+            </a:endParaRPr>
+          </a:p>
+          <a:p>
+            <a:r>
+              <a:rPr lang="en-GB" sz="1100" dirty="0">
+                <a:solidFill>
+                  <a:schemeClr val="bg1"/>
+                </a:solidFill>
+              </a:rPr>
+              <a:t>Step 2: Feed the General knowledge back</a:t>
+            </a:r>
+          </a:p>
+          <a:p>
+            <a:pPr marL="171450" indent="-171450">
+              <a:buFont typeface="Wingdings" panose="05000000000000000000" pitchFamily="2" charset="2"/>
+              <a:buChar char="è"/>
+            </a:pPr>
+            <a:r>
+              <a:rPr lang="en-GB" sz="1100" dirty="0">
+                <a:solidFill>
+                  <a:schemeClr val="bg1"/>
+                </a:solidFill>
+              </a:rPr>
+              <a:t>Using these facts, explain why an airplane can fly despite its weight, in simple terms</a:t>
+            </a:r>
+            <a:endParaRPr lang="en-GB" sz="1100" b="1" dirty="0">
+              <a:solidFill>
+                <a:schemeClr val="bg1"/>
+              </a:solidFill>
+            </a:endParaRPr>
+          </a:p>
+          <a:p>
+            <a:endParaRPr lang="en-US" sz="1150" dirty="0">
+              <a:solidFill>
+                <a:schemeClr val="bg1"/>
+              </a:solidFill>
+            </a:endParaRPr>
           </a:p>
         </p:txBody>
       </p:sp>
@@ -16421,53 +16615,108 @@
           <a:bodyPr wrap="square" lIns="0" tIns="0" rIns="0" bIns="0" rtlCol="0" anchor="t"/>
           <a:lstStyle/>
           <a:p>
+            <a:r>
+              <a:rPr lang="en-US" sz="1150" i="1" dirty="0">
+                <a:solidFill>
+                  <a:schemeClr val="bg1"/>
+                </a:solidFill>
+                <a:latin typeface="Calibri" pitchFamily="34" charset="0"/>
+                <a:ea typeface="Calibri" pitchFamily="34" charset="-122"/>
+                <a:cs typeface="Calibri" pitchFamily="34" charset="-120"/>
+              </a:rPr>
+              <a:t>Specific question: “</a:t>
+            </a:r>
+            <a:r>
+              <a:rPr lang="en-GB" sz="1200" dirty="0">
+                <a:solidFill>
+                  <a:schemeClr val="bg1"/>
+                </a:solidFill>
+              </a:rPr>
+              <a:t>My phone battery drains quickly overnight. Why?</a:t>
+            </a:r>
+            <a:r>
+              <a:rPr lang="en-US" sz="1150" i="1" dirty="0">
+                <a:solidFill>
+                  <a:srgbClr val="E8EDF5"/>
+                </a:solidFill>
+                <a:latin typeface="Calibri" pitchFamily="34" charset="0"/>
+                <a:ea typeface="Calibri" pitchFamily="34" charset="-122"/>
+                <a:cs typeface="Calibri" pitchFamily="34" charset="-120"/>
+              </a:rPr>
+              <a:t>”</a:t>
+            </a:r>
+            <a:endParaRPr lang="en-US" sz="1150" dirty="0"/>
+          </a:p>
+          <a:p>
             <a:pPr marL="0" indent="0">
               <a:lnSpc>
                 <a:spcPct val="130000"/>
               </a:lnSpc>
               <a:buNone/>
             </a:pPr>
+            <a:endParaRPr lang="en-US" sz="1150" dirty="0"/>
+          </a:p>
+          <a:p>
             <a:r>
               <a:rPr lang="en-US" sz="1150" i="1" dirty="0">
                 <a:solidFill>
-                  <a:srgbClr val="E8EDF5"/>
-                </a:solidFill>
-                <a:latin typeface="Calibri" pitchFamily="34" charset="0"/>
-                <a:ea typeface="Calibri" pitchFamily="34" charset="-122"/>
-                <a:cs typeface="Calibri" pitchFamily="34" charset="-120"/>
-              </a:rPr>
-              <a:t>Specific question: “A 2 kg ball is dropped from 10 m. What is its speed at impact?”</a:t>
-            </a:r>
-            <a:endParaRPr lang="en-US" sz="1150" dirty="0"/>
-          </a:p>
-          <a:p>
-            <a:pPr marL="0" indent="0">
-              <a:lnSpc>
-                <a:spcPct val="130000"/>
-              </a:lnSpc>
-              <a:buNone/>
-            </a:pPr>
-            <a:endParaRPr lang="en-US" sz="1150" dirty="0"/>
-          </a:p>
-          <a:p>
-            <a:pPr marL="0" indent="0">
-              <a:lnSpc>
-                <a:spcPct val="130000"/>
-              </a:lnSpc>
-              <a:buNone/>
-            </a:pPr>
+                  <a:schemeClr val="bg1"/>
+                </a:solidFill>
+                <a:latin typeface="Calibri" pitchFamily="34" charset="0"/>
+                <a:ea typeface="Calibri" pitchFamily="34" charset="-122"/>
+                <a:cs typeface="Calibri" pitchFamily="34" charset="-120"/>
+              </a:rPr>
+              <a:t>Step-back question: “</a:t>
+            </a:r>
+            <a:r>
+              <a:rPr lang="en-GB" sz="1200" dirty="0">
+                <a:solidFill>
+                  <a:schemeClr val="bg1"/>
+                </a:solidFill>
+              </a:rPr>
+              <a:t>What are the general factors that cause smartphone batteries to drain?</a:t>
+            </a:r>
             <a:r>
               <a:rPr lang="en-US" sz="1150" i="1" dirty="0">
                 <a:solidFill>
-                  <a:srgbClr val="E8EDF5"/>
-                </a:solidFill>
-                <a:latin typeface="Calibri" pitchFamily="34" charset="0"/>
-                <a:ea typeface="Calibri" pitchFamily="34" charset="-122"/>
-                <a:cs typeface="Calibri" pitchFamily="34" charset="-120"/>
-              </a:rPr>
-              <a:t>Step-back question: “What principle governs an object's speed in free fall?” → answer: conservation of energy → apply it to solve the specific case.</a:t>
-            </a:r>
-            <a:endParaRPr lang="en-US" sz="1150" dirty="0"/>
+                  <a:schemeClr val="bg1"/>
+                </a:solidFill>
+                <a:latin typeface="Calibri" pitchFamily="34" charset="0"/>
+                <a:ea typeface="Calibri" pitchFamily="34" charset="-122"/>
+                <a:cs typeface="Calibri" pitchFamily="34" charset="-120"/>
+              </a:rPr>
+              <a:t>” → answer: </a:t>
+            </a:r>
+            <a:r>
+              <a:rPr lang="en-GB" sz="1200" dirty="0">
+                <a:solidFill>
+                  <a:schemeClr val="bg1"/>
+                </a:solidFill>
+              </a:rPr>
+              <a:t>Background apps, screen activity, network connections, location services, high brightness, and battery health can cause battery drain</a:t>
+            </a:r>
+          </a:p>
+          <a:p>
+            <a:endParaRPr lang="en-GB" sz="1200" dirty="0">
+              <a:solidFill>
+                <a:schemeClr val="bg1"/>
+              </a:solidFill>
+            </a:endParaRPr>
+          </a:p>
+          <a:p>
+            <a:r>
+              <a:rPr lang="en-GB" sz="1200" dirty="0">
+                <a:solidFill>
+                  <a:schemeClr val="bg1"/>
+                </a:solidFill>
+              </a:rPr>
+              <a:t>Actual answer: For overnight drain, check background apps, mobile/Wi-Fi connections, location services, and battery health</a:t>
+            </a:r>
+            <a:endParaRPr lang="en-US" sz="1150" dirty="0">
+              <a:solidFill>
+                <a:schemeClr val="bg1"/>
+              </a:solidFill>
+            </a:endParaRPr>
           </a:p>
         </p:txBody>
       </p:sp>
@@ -17309,8 +17558,8 @@
         </p:nvSpPr>
         <p:spPr>
           <a:xfrm>
-            <a:off x="6949440" y="1874520"/>
-            <a:ext cx="4663440" cy="4343400"/>
+            <a:off x="6949440" y="594360"/>
+            <a:ext cx="4663440" cy="5623560"/>
           </a:xfrm>
           <a:prstGeom prst="roundRect">
             <a:avLst>
@@ -17331,7 +17580,7 @@
         </p:nvSpPr>
         <p:spPr>
           <a:xfrm>
-            <a:off x="7269480" y="2194560"/>
+            <a:off x="7200900" y="743646"/>
             <a:ext cx="777240" cy="777240"/>
           </a:xfrm>
           <a:prstGeom prst="ellipse">
@@ -17359,7 +17608,7 @@
         </p:blipFill>
         <p:spPr>
           <a:xfrm>
-            <a:off x="7444359" y="2369439"/>
+            <a:off x="7375779" y="918525"/>
             <a:ext cx="427482" cy="427482"/>
           </a:xfrm>
           <a:prstGeom prst="rect">
@@ -17375,7 +17624,7 @@
         </p:nvSpPr>
         <p:spPr>
           <a:xfrm>
-            <a:off x="8229600" y="2286000"/>
+            <a:off x="8161020" y="835086"/>
             <a:ext cx="3108960" cy="274320"/>
           </a:xfrm>
           <a:prstGeom prst="rect">
@@ -17414,7 +17663,7 @@
         </p:nvSpPr>
         <p:spPr>
           <a:xfrm>
-            <a:off x="8229600" y="2514600"/>
+            <a:off x="8161020" y="1063686"/>
             <a:ext cx="3108960" cy="457200"/>
           </a:xfrm>
           <a:prstGeom prst="rect">
@@ -17453,8 +17702,8 @@
         </p:nvSpPr>
         <p:spPr>
           <a:xfrm>
-            <a:off x="7269480" y="3246120"/>
-            <a:ext cx="4023360" cy="2468880"/>
+            <a:off x="7269480" y="1661922"/>
+            <a:ext cx="4023360" cy="4053078"/>
           </a:xfrm>
           <a:prstGeom prst="roundRect">
             <a:avLst>
@@ -17475,8 +17724,8 @@
         </p:nvSpPr>
         <p:spPr>
           <a:xfrm>
-            <a:off x="7452360" y="3410712"/>
-            <a:ext cx="3657600" cy="2148840"/>
+            <a:off x="7452360" y="1703766"/>
+            <a:ext cx="3657600" cy="3855786"/>
           </a:xfrm>
           <a:prstGeom prst="rect">
             <a:avLst/>
@@ -17487,6 +17736,17 @@
         <p:txBody>
           <a:bodyPr wrap="square" lIns="0" tIns="0" rIns="0" bIns="0" rtlCol="0" anchor="t"/>
           <a:lstStyle/>
+          <a:p>
+            <a:r>
+              <a:rPr lang="en-GB" sz="1200" dirty="0">
+                <a:solidFill>
+                  <a:schemeClr val="bg1"/>
+                </a:solidFill>
+              </a:rPr>
+              <a:t>“Plan a 3-day trip to Paris, including sightseeing, restaurants, and transport.”</a:t>
+            </a:r>
+            <a:endParaRPr lang="en-US" sz="1150" dirty="0"/>
+          </a:p>
           <a:p>
             <a:pPr marL="0" indent="0">
               <a:lnSpc>
@@ -17494,18 +17754,261 @@
               </a:lnSpc>
               <a:buNone/>
             </a:pPr>
-            <a:r>
-              <a:rPr lang="en-US" sz="1150" i="1" dirty="0">
-                <a:solidFill>
-                  <a:srgbClr val="E8EDF5"/>
-                </a:solidFill>
-                <a:latin typeface="Calibri" pitchFamily="34" charset="0"/>
-                <a:ea typeface="Calibri" pitchFamily="34" charset="-122"/>
-                <a:cs typeface="Calibri" pitchFamily="34" charset="-120"/>
-              </a:rPr>
-              <a:t>“If a train travels 60 km in the first hour and then 15% faster each hour after, how far has it gone after 3 hours?”</a:t>
-            </a:r>
             <a:endParaRPr lang="en-US" sz="1150" dirty="0"/>
+          </a:p>
+          <a:p>
+            <a:r>
+              <a:rPr lang="en-GB" sz="1200" b="1" dirty="0">
+                <a:solidFill>
+                  <a:schemeClr val="bg1"/>
+                </a:solidFill>
+              </a:rPr>
+              <a:t>Subproblem 1 — Identify places</a:t>
+            </a:r>
+            <a:endParaRPr lang="en-GB" sz="1200" dirty="0">
+              <a:solidFill>
+                <a:schemeClr val="bg1"/>
+              </a:solidFill>
+            </a:endParaRPr>
+          </a:p>
+          <a:p>
+            <a:r>
+              <a:rPr lang="en-GB" sz="1200" dirty="0">
+                <a:solidFill>
+                  <a:schemeClr val="bg1"/>
+                </a:solidFill>
+              </a:rPr>
+              <a:t>“What are the main places worth visiting in Paris?”</a:t>
+            </a:r>
+          </a:p>
+          <a:p>
+            <a:r>
+              <a:rPr lang="en-GB" sz="1200" dirty="0">
+                <a:solidFill>
+                  <a:schemeClr val="bg1"/>
+                </a:solidFill>
+              </a:rPr>
+              <a:t>→ Eiffel Tower, Louvre, Notre-Dame, Montmartre...</a:t>
+            </a:r>
+          </a:p>
+          <a:p>
+            <a:endParaRPr lang="en-GB" sz="1200" dirty="0">
+              <a:solidFill>
+                <a:schemeClr val="bg1"/>
+              </a:solidFill>
+            </a:endParaRPr>
+          </a:p>
+          <a:p>
+            <a:r>
+              <a:rPr lang="en-GB" sz="1200" b="1" dirty="0">
+                <a:solidFill>
+                  <a:schemeClr val="bg1"/>
+                </a:solidFill>
+              </a:rPr>
+              <a:t>Subproblem 2 — Organize the places</a:t>
+            </a:r>
+            <a:endParaRPr lang="en-GB" sz="1200" dirty="0">
+              <a:solidFill>
+                <a:schemeClr val="bg1"/>
+              </a:solidFill>
+            </a:endParaRPr>
+          </a:p>
+          <a:p>
+            <a:r>
+              <a:rPr lang="en-GB" sz="1200" dirty="0">
+                <a:solidFill>
+                  <a:schemeClr val="bg1"/>
+                </a:solidFill>
+              </a:rPr>
+              <a:t>“Group these places into 3 logical days based on location.”</a:t>
+            </a:r>
+          </a:p>
+          <a:p>
+            <a:r>
+              <a:rPr lang="en-GB" sz="1200" dirty="0">
+                <a:solidFill>
+                  <a:schemeClr val="bg1"/>
+                </a:solidFill>
+              </a:rPr>
+              <a:t>→ </a:t>
+            </a:r>
+            <a:r>
+              <a:rPr lang="en-GB" sz="1200" b="1" dirty="0">
+                <a:solidFill>
+                  <a:schemeClr val="bg1"/>
+                </a:solidFill>
+              </a:rPr>
+              <a:t>Day 1:</a:t>
+            </a:r>
+            <a:r>
+              <a:rPr lang="en-GB" sz="1200" dirty="0">
+                <a:solidFill>
+                  <a:schemeClr val="bg1"/>
+                </a:solidFill>
+              </a:rPr>
+              <a:t> Eiffel Tower + nearby attractions</a:t>
+            </a:r>
+            <a:br>
+              <a:rPr lang="en-GB" sz="1200" dirty="0">
+                <a:solidFill>
+                  <a:schemeClr val="bg1"/>
+                </a:solidFill>
+              </a:rPr>
+            </a:br>
+            <a:r>
+              <a:rPr lang="en-GB" sz="1200" dirty="0">
+                <a:solidFill>
+                  <a:schemeClr val="bg1"/>
+                </a:solidFill>
+              </a:rPr>
+              <a:t>→ </a:t>
+            </a:r>
+            <a:r>
+              <a:rPr lang="en-GB" sz="1200" b="1" dirty="0">
+                <a:solidFill>
+                  <a:schemeClr val="bg1"/>
+                </a:solidFill>
+              </a:rPr>
+              <a:t>Day 2:</a:t>
+            </a:r>
+            <a:r>
+              <a:rPr lang="en-GB" sz="1200" dirty="0">
+                <a:solidFill>
+                  <a:schemeClr val="bg1"/>
+                </a:solidFill>
+              </a:rPr>
+              <a:t> Louvre + central Paris</a:t>
+            </a:r>
+            <a:br>
+              <a:rPr lang="en-GB" sz="1200" dirty="0">
+                <a:solidFill>
+                  <a:schemeClr val="bg1"/>
+                </a:solidFill>
+              </a:rPr>
+            </a:br>
+            <a:r>
+              <a:rPr lang="en-GB" sz="1200" dirty="0">
+                <a:solidFill>
+                  <a:schemeClr val="bg1"/>
+                </a:solidFill>
+              </a:rPr>
+              <a:t>→ </a:t>
+            </a:r>
+            <a:r>
+              <a:rPr lang="en-GB" sz="1200" b="1" dirty="0">
+                <a:solidFill>
+                  <a:schemeClr val="bg1"/>
+                </a:solidFill>
+              </a:rPr>
+              <a:t>Day 3:</a:t>
+            </a:r>
+            <a:r>
+              <a:rPr lang="en-GB" sz="1200" dirty="0">
+                <a:solidFill>
+                  <a:schemeClr val="bg1"/>
+                </a:solidFill>
+              </a:rPr>
+              <a:t> Montmartre + Sacré-</a:t>
+            </a:r>
+            <a:r>
+              <a:rPr lang="en-GB" sz="1200" dirty="0" err="1">
+                <a:solidFill>
+                  <a:schemeClr val="bg1"/>
+                </a:solidFill>
+              </a:rPr>
+              <a:t>Cœur</a:t>
+            </a:r>
+            <a:r>
+              <a:rPr lang="en-GB" sz="1200" dirty="0">
+                <a:solidFill>
+                  <a:schemeClr val="bg1"/>
+                </a:solidFill>
+              </a:rPr>
+              <a:t>...</a:t>
+            </a:r>
+          </a:p>
+          <a:p>
+            <a:endParaRPr lang="en-GB" sz="1200" dirty="0">
+              <a:solidFill>
+                <a:schemeClr val="bg1"/>
+              </a:solidFill>
+            </a:endParaRPr>
+          </a:p>
+          <a:p>
+            <a:r>
+              <a:rPr lang="en-GB" sz="1200" b="1" dirty="0">
+                <a:solidFill>
+                  <a:schemeClr val="bg1"/>
+                </a:solidFill>
+              </a:rPr>
+              <a:t>Subproblem 3 — Build the itinerary</a:t>
+            </a:r>
+            <a:endParaRPr lang="en-GB" sz="1200" dirty="0">
+              <a:solidFill>
+                <a:schemeClr val="bg1"/>
+              </a:solidFill>
+            </a:endParaRPr>
+          </a:p>
+          <a:p>
+            <a:r>
+              <a:rPr lang="en-GB" sz="1200" dirty="0">
+                <a:solidFill>
+                  <a:schemeClr val="bg1"/>
+                </a:solidFill>
+              </a:rPr>
+              <a:t>“Now add transport, meals and approximate timings to each day.”</a:t>
+            </a:r>
+          </a:p>
+          <a:p>
+            <a:r>
+              <a:rPr lang="en-GB" sz="1200" dirty="0">
+                <a:solidFill>
+                  <a:schemeClr val="bg1"/>
+                </a:solidFill>
+              </a:rPr>
+              <a:t>→ </a:t>
+            </a:r>
+            <a:r>
+              <a:rPr lang="en-GB" sz="1200" b="1" dirty="0">
+                <a:solidFill>
+                  <a:schemeClr val="bg1"/>
+                </a:solidFill>
+              </a:rPr>
+              <a:t>Complete 3-day itinerary</a:t>
+            </a:r>
+            <a:endParaRPr lang="en-GB" sz="1200" dirty="0">
+              <a:solidFill>
+                <a:schemeClr val="bg1"/>
+              </a:solidFill>
+            </a:endParaRPr>
+          </a:p>
+          <a:p>
+            <a:endParaRPr lang="en-GB" sz="1200" dirty="0">
+              <a:solidFill>
+                <a:schemeClr val="bg1"/>
+              </a:solidFill>
+            </a:endParaRPr>
+          </a:p>
+          <a:p>
+            <a:endParaRPr lang="en-GB" sz="1200" dirty="0">
+              <a:solidFill>
+                <a:schemeClr val="bg1"/>
+              </a:solidFill>
+            </a:endParaRPr>
+          </a:p>
+          <a:p>
+            <a:endParaRPr lang="en-GB" sz="1200" dirty="0">
+              <a:solidFill>
+                <a:schemeClr val="bg1"/>
+              </a:solidFill>
+            </a:endParaRPr>
+          </a:p>
+          <a:p>
+            <a:endParaRPr lang="en-GB" sz="1200" dirty="0">
+              <a:solidFill>
+                <a:schemeClr val="bg1"/>
+              </a:solidFill>
+            </a:endParaRPr>
           </a:p>
           <a:p>
             <a:pPr marL="0" indent="0">
@@ -17514,26 +18017,6 @@
               </a:lnSpc>
               <a:buNone/>
             </a:pPr>
-            <a:endParaRPr lang="en-US" sz="1150" dirty="0"/>
-          </a:p>
-          <a:p>
-            <a:pPr marL="0" indent="0">
-              <a:lnSpc>
-                <a:spcPct val="130000"/>
-              </a:lnSpc>
-              <a:buNone/>
-            </a:pPr>
-            <a:r>
-              <a:rPr lang="en-US" sz="1150" i="1" dirty="0">
-                <a:solidFill>
-                  <a:srgbClr val="E8EDF5"/>
-                </a:solidFill>
-                <a:latin typeface="Calibri" pitchFamily="34" charset="0"/>
-                <a:ea typeface="Calibri" pitchFamily="34" charset="-122"/>
-                <a:cs typeface="Calibri" pitchFamily="34" charset="-120"/>
-              </a:rPr>
-              <a:t>Subproblem 1: hour-1 distance. → Subproblem 2: hour-2 distance, using hour-1's result. → Subproblem 3: total.</a:t>
-            </a:r>
             <a:endParaRPr lang="en-US" sz="1150" dirty="0"/>
           </a:p>
         </p:txBody>
